--- a/docs/hackathon/mba-hackathon-deck.pptx
+++ b/docs/hackathon/mba-hackathon-deck.pptx
@@ -5312,7 +5312,7 @@
                 </a:solidFill>
                 <a:latin typeface="PingFang SC"/>
               </a:rPr>
-              <a:t>🦞  Demo 报告</a:t>
+              <a:t>⚡  现场跑一次</a:t>
             </a:r>
           </a:p>
         </p:txBody>
@@ -5347,7 +5347,7 @@
                 </a:solidFill>
                 <a:latin typeface="Menlo"/>
               </a:rPr>
-              <a:t>/metric-brand-auditor/reports/zhifang-atelier/report.html</a:t>
+              <a:t>/mba YourBrand  →  ~25 min 出报告</a:t>
             </a:r>
           </a:p>
         </p:txBody>
@@ -5382,7 +5382,7 @@
                 </a:solidFill>
                 <a:latin typeface="PingFang SC"/>
               </a:rPr>
-              <a:t>现场演示请到 reports/zhifang-atelier/report.html</a:t>
+              <a:t>现场演示:/mba &lt;一个评委你想看的品牌&gt;</a:t>
             </a:r>
           </a:p>
         </p:txBody>
@@ -16623,7 +16623,7 @@
                 </a:solidFill>
                 <a:latin typeface="PingFang SC"/>
               </a:rPr>
-              <a:t>演示报告:zhifang-atelier v1</a:t>
+              <a:t>自包含 HTML 报告(Chart.js + Mermaid · 9 块)</a:t>
             </a:r>
           </a:p>
           <a:p>
@@ -16639,7 +16639,7 @@
                 </a:solidFill>
                 <a:latin typeface="PingFang SC"/>
               </a:rPr>
-              <a:t>• 完整 _raw / reviews / report.{md,html}</a:t>
+              <a:t>• 雷达图 / 异议热力图 / 影响力流程图 / 定位象限</a:t>
             </a:r>
           </a:p>
           <a:p>
